--- a/Actividad 2.2 Reporte de Practica_BelenLopez_Sim_7ISCM.pptx
+++ b/Actividad 2.2 Reporte de Practica_BelenLopez_Sim_7ISCM.pptx
@@ -6812,7 +6812,7 @@
                 <a:cs typeface="Calibri" panose="020F0502020204030204" pitchFamily="34" charset="0"/>
                 <a:sym typeface="Glacial Indifference"/>
               </a:rPr>
-              <a:t> 2.2 REPORTE DE PRACTICA</a:t>
+              <a:t> 2.3 BANCO DE EJERCICIOS </a:t>
             </a:r>
           </a:p>
           <a:p>
@@ -7248,12 +7248,75 @@
           </a:p>
         </p:txBody>
       </p:sp>
+      <p:sp>
+        <p:nvSpPr>
+          <p:cNvPr id="8" name="CuadroTexto 7">
+            <a:extLst>
+              <a:ext uri="{FF2B5EF4-FFF2-40B4-BE49-F238E27FC236}">
+                <a16:creationId xmlns:a16="http://schemas.microsoft.com/office/drawing/2014/main" id="{DCFBED2C-3019-4CD4-A9D3-CDE7B493C8CA}"/>
+              </a:ext>
+            </a:extLst>
+          </p:cNvPr>
+          <p:cNvSpPr txBox="1"/>
+          <p:nvPr/>
+        </p:nvSpPr>
+        <p:spPr>
+          <a:xfrm>
+            <a:off x="535302" y="76505"/>
+            <a:ext cx="9827898" cy="2031325"/>
+          </a:xfrm>
+          <a:prstGeom prst="rect">
+            <a:avLst/>
+          </a:prstGeom>
+          <a:noFill/>
+        </p:spPr>
+        <p:txBody>
+          <a:bodyPr wrap="square" rtlCol="0">
+            <a:spAutoFit/>
+          </a:bodyPr>
+          <a:lstStyle/>
+          <a:p>
+            <a:r>
+              <a:rPr lang="es-MX" dirty="0"/>
+              <a:t>Generador </a:t>
+            </a:r>
+            <a:r>
+              <a:rPr lang="es-MX" dirty="0" err="1"/>
+              <a:t>congruencial</a:t>
+            </a:r>
+            <a:r>
+              <a:rPr lang="es-MX" dirty="0"/>
+              <a:t> en Java</a:t>
+            </a:r>
+          </a:p>
+          <a:p>
+            <a:endParaRPr lang="es-MX" dirty="0"/>
+          </a:p>
+          <a:p>
+            <a:pPr algn="just"/>
+            <a:r>
+              <a:rPr lang="es-MX" dirty="0">
+                <a:latin typeface="Calibri" panose="020F0502020204030204" pitchFamily="34" charset="0"/>
+                <a:ea typeface="Calibri" panose="020F0502020204030204" pitchFamily="34" charset="0"/>
+                <a:cs typeface="Calibri" panose="020F0502020204030204" pitchFamily="34" charset="0"/>
+              </a:rPr>
+              <a:t>El programa comienza con el número 4 y aplica la misma operación diez veces. Cada resultado se divide entre 16 para obtener un valor entre 0 y 1. Si se vuelve a ejecutar, aparecen los mismos números porque el valor inicial no cambia.</a:t>
+            </a:r>
+          </a:p>
+          <a:p>
+            <a:endParaRPr lang="es-MX" dirty="0"/>
+          </a:p>
+          <a:p>
+            <a:endParaRPr lang="es-MX" dirty="0"/>
+          </a:p>
+        </p:txBody>
+      </p:sp>
       <p:pic>
         <p:nvPicPr>
-          <p:cNvPr id="5" name="Imagen 4">
+          <p:cNvPr id="10" name="Imagen 9">
             <a:extLst>
               <a:ext uri="{FF2B5EF4-FFF2-40B4-BE49-F238E27FC236}">
-                <a16:creationId xmlns:a16="http://schemas.microsoft.com/office/drawing/2014/main" id="{9541458E-B148-4279-8CA1-0BB32039D056}"/>
+                <a16:creationId xmlns:a16="http://schemas.microsoft.com/office/drawing/2014/main" id="{CEB0585B-E9E4-4D5F-B2D2-9F0D42D1A8BD}"/>
               </a:ext>
             </a:extLst>
           </p:cNvPr>
@@ -7270,107 +7333,14 @@
         </p:blipFill>
         <p:spPr>
           <a:xfrm>
-            <a:off x="535302" y="3007814"/>
-            <a:ext cx="5540668" cy="2745286"/>
+            <a:off x="2145988" y="2371725"/>
+            <a:ext cx="8064811" cy="4291882"/>
           </a:xfrm>
           <a:prstGeom prst="rect">
             <a:avLst/>
           </a:prstGeom>
         </p:spPr>
       </p:pic>
-      <p:pic>
-        <p:nvPicPr>
-          <p:cNvPr id="7" name="Imagen 6">
-            <a:extLst>
-              <a:ext uri="{FF2B5EF4-FFF2-40B4-BE49-F238E27FC236}">
-                <a16:creationId xmlns:a16="http://schemas.microsoft.com/office/drawing/2014/main" id="{4960CA4D-0734-4EA8-B620-DC8CFEF5D636}"/>
-              </a:ext>
-            </a:extLst>
-          </p:cNvPr>
-          <p:cNvPicPr>
-            <a:picLocks noChangeAspect="1"/>
-          </p:cNvPicPr>
-          <p:nvPr/>
-        </p:nvPicPr>
-        <p:blipFill>
-          <a:blip r:embed="rId3"/>
-          <a:stretch>
-            <a:fillRect/>
-          </a:stretch>
-        </p:blipFill>
-        <p:spPr>
-          <a:xfrm>
-            <a:off x="6419849" y="3007814"/>
-            <a:ext cx="5417823" cy="2745285"/>
-          </a:xfrm>
-          <a:prstGeom prst="rect">
-            <a:avLst/>
-          </a:prstGeom>
-        </p:spPr>
-      </p:pic>
-      <p:sp>
-        <p:nvSpPr>
-          <p:cNvPr id="8" name="CuadroTexto 7">
-            <a:extLst>
-              <a:ext uri="{FF2B5EF4-FFF2-40B4-BE49-F238E27FC236}">
-                <a16:creationId xmlns:a16="http://schemas.microsoft.com/office/drawing/2014/main" id="{DCFBED2C-3019-4CD4-A9D3-CDE7B493C8CA}"/>
-              </a:ext>
-            </a:extLst>
-          </p:cNvPr>
-          <p:cNvSpPr txBox="1"/>
-          <p:nvPr/>
-        </p:nvSpPr>
-        <p:spPr>
-          <a:xfrm>
-            <a:off x="535302" y="114308"/>
-            <a:ext cx="9827898" cy="2585323"/>
-          </a:xfrm>
-          <a:prstGeom prst="rect">
-            <a:avLst/>
-          </a:prstGeom>
-          <a:noFill/>
-        </p:spPr>
-        <p:txBody>
-          <a:bodyPr wrap="square" rtlCol="0">
-            <a:spAutoFit/>
-          </a:bodyPr>
-          <a:lstStyle/>
-          <a:p>
-            <a:r>
-              <a:rPr lang="es-MX" dirty="0"/>
-              <a:t>PYTHON </a:t>
-            </a:r>
-          </a:p>
-          <a:p>
-            <a:endParaRPr lang="es-MX" dirty="0"/>
-          </a:p>
-          <a:p>
-            <a:pPr algn="just"/>
-            <a:r>
-              <a:rPr lang="es-MX" dirty="0">
-                <a:latin typeface="Calibri" panose="020F0502020204030204" pitchFamily="34" charset="0"/>
-                <a:ea typeface="Calibri" panose="020F0502020204030204" pitchFamily="34" charset="0"/>
-                <a:cs typeface="Calibri" panose="020F0502020204030204" pitchFamily="34" charset="0"/>
-              </a:rPr>
-              <a:t>En Python hice un programa para generar diez números pseudoaleatorios. Le di unos valores iniciales y el programa realizó una operación varias veces: tomó el resultado de una vuelta para calcular el de la siguiente. Después convirtió cada número en un valor entre 0 y 1.</a:t>
-            </a:r>
-          </a:p>
-          <a:p>
-            <a:pPr algn="just"/>
-            <a:r>
-              <a:rPr lang="es-MX" dirty="0">
-                <a:latin typeface="Calibri" panose="020F0502020204030204" pitchFamily="34" charset="0"/>
-                <a:ea typeface="Calibri" panose="020F0502020204030204" pitchFamily="34" charset="0"/>
-                <a:cs typeface="Calibri" panose="020F0502020204030204" pitchFamily="34" charset="0"/>
-              </a:rPr>
-              <a:t>Al ejecutarlo, pude ver los diez resultados en pantalla. El primero fue 0.375. Si vuelvo a usar los mismos valores iniciales, aparece la misma secuencia; por eso los números parecen elegidos al azar, pero en realidad siguen una operación definida.</a:t>
-            </a:r>
-          </a:p>
-          <a:p>
-            <a:endParaRPr lang="es-MX" dirty="0"/>
-          </a:p>
-        </p:txBody>
-      </p:sp>
     </p:spTree>
     <p:extLst>
       <p:ext uri="{BB962C8B-B14F-4D97-AF65-F5344CB8AC3E}">
@@ -7781,10 +7751,10 @@
       </p:sp>
       <p:pic>
         <p:nvPicPr>
-          <p:cNvPr id="5" name="Imagen 4">
+          <p:cNvPr id="7" name="Imagen 6">
             <a:extLst>
               <a:ext uri="{FF2B5EF4-FFF2-40B4-BE49-F238E27FC236}">
-                <a16:creationId xmlns:a16="http://schemas.microsoft.com/office/drawing/2014/main" id="{D1F8E23B-4714-4603-A705-24092842E9AA}"/>
+                <a16:creationId xmlns:a16="http://schemas.microsoft.com/office/drawing/2014/main" id="{F3AB8C79-4898-42E3-936C-B9BE19D1BCEB}"/>
               </a:ext>
             </a:extLst>
           </p:cNvPr>
@@ -7801,8 +7771,8 @@
         </p:blipFill>
         <p:spPr>
           <a:xfrm>
-            <a:off x="3090150" y="2943226"/>
-            <a:ext cx="7063500" cy="3546527"/>
+            <a:off x="2743200" y="2855741"/>
+            <a:ext cx="6972300" cy="3818452"/>
           </a:xfrm>
           <a:prstGeom prst="rect">
             <a:avLst/>
@@ -8155,6 +8125,17 @@
         <p:txBody>
           <a:bodyPr/>
           <a:lstStyle/>
+          <a:p>
+            <a:pPr marL="0" indent="0">
+              <a:buNone/>
+            </a:pPr>
+            <a:r>
+              <a:rPr lang="es-MX" dirty="0">
+                <a:hlinkClick r:id="rId2"/>
+              </a:rPr>
+              <a:t>https://github.com/lopezramirezsimone-cyber/practica-numeros-pseudoaleatorios.git</a:t>
+            </a:r>
+          </a:p>
           <a:p>
             <a:pPr marL="0" indent="0">
               <a:buNone/>
